--- a/dist/초2/체육·보건·안전/건강과감정/초2_체육·보건·안전_건강과감정_01_식사·수면·위생습관_학생용.pptx
+++ b/dist/초2/체육·보건·안전/건강과감정/초2_체육·보건·안전_건강과감정_01_식사·수면·위생습관_학생용.pptx
@@ -119,13 +119,13 @@
   <p:extLst>
     <p:ext uri="{521415D9-36F7-43E2-AB2F-B90AF26B5E84}">
       <p14:sectionLst xmlns:p14="http://schemas.microsoft.com/office/powerpoint/2010/main">
-        <p14:section name="도입" id="{0860164b-170b-a544-d960-ba98b4f6527e}">
+        <p14:section name="도입" id="{762887ae-f0fa-23b8-8623-ed3bf118f907}">
           <p14:sldIdLst>
             <p14:sldId id="256"/>
             <p14:sldId id="257"/>
           </p14:sldIdLst>
         </p14:section>
-        <p14:section name="개념" id="{10864e0e-4383-3682-795f-d4f9461268d5}">
+        <p14:section name="개념" id="{d874c6bc-bfcd-97f1-6d2a-3d5aaa93103d}">
           <p14:sldIdLst>
             <p14:sldId id="258"/>
             <p14:sldId id="259"/>
@@ -133,7 +133,7 @@
             <p14:sldId id="263"/>
           </p14:sldIdLst>
         </p14:section>
-        <p14:section name="연습" id="{4304c7fc-7004-0b40-d7fa-3e8ab65299db}">
+        <p14:section name="연습" id="{3a7296be-083e-29b8-dced-5c025cf3a99d}">
           <p14:sldIdLst>
             <p14:sldId id="260"/>
             <p14:sldId id="261"/>
@@ -141,23 +141,23 @@
             <p14:sldId id="265"/>
           </p14:sldIdLst>
         </p14:section>
-        <p14:section name="개념" id="{475ef585-8fce-f29b-018e-d2d94c3eab03}">
+        <p14:section name="개념" id="{ec2bf27b-9280-a394-b092-4d7fc4d46843}">
           <p14:sldIdLst/>
         </p14:section>
-        <p14:section name="연습" id="{c56bfcab-059d-989c-0f1d-3f3f5e62cc41}">
+        <p14:section name="연습" id="{db6b1658-6995-f423-094a-04b728d7539b}">
           <p14:sldIdLst/>
         </p14:section>
-        <p14:section name="확인" id="{e0ea3242-48cd-a7d3-5b36-8dcdc5b1e490}">
+        <p14:section name="확인" id="{5d58d629-2bec-8c55-a7c9-08c9452bc533}">
           <p14:sldIdLst>
             <p14:sldId id="266"/>
           </p14:sldIdLst>
         </p14:section>
-        <p14:section name="정리" id="{eddde434-35e3-176f-11c6-cb68480cbf4c}">
+        <p14:section name="정리" id="{7e854c33-8c5d-b788-68c1-1999beff77f8}">
           <p14:sldIdLst>
             <p14:sldId id="267"/>
           </p14:sldIdLst>
         </p14:section>
-        <p14:section name="보충" id="{5293dad1-037b-e5b1-1f4e-1b7f9299144a}">
+        <p14:section name="보충" id="{71c8cb13-a926-80b0-c825-5dc9c241ae4b}">
           <p14:sldIdLst>
             <p14:sldId id="268"/>
           </p14:sldIdLst>
